--- a/it/slides/01-Architettura_dei_Calcolatori-PRG32_e_PRG32-QT_Installazione-Lab.pptx
+++ b/it/slides/01-Architettura_dei_Calcolatori-PRG32_e_PRG32-QT_Installazione-Lab.pptx
@@ -134,13 +134,13 @@
   <p:extLst>
     <p:ext uri="{521415D9-36F7-43E2-AB2F-B90AF26B5E84}">
       <p14:sectionLst xmlns:p14="http://schemas.microsoft.com/office/powerpoint/2010/main">
-        <p14:section name="Apertura" id="{624d6034-c4e6-bf48-acf0-de9b3d19c257}">
+        <p14:section name="Apertura" id="{4f3a6705-d646-9949-8a3a-830cce817339}">
           <p14:sldIdLst>
             <p14:sldId id="256"/>
             <p14:sldId id="257"/>
           </p14:sldIdLst>
         </p14:section>
-        <p14:section name="Passo 1: installare PRG32-QT" id="{159b2587-bd1d-a653-e27a-f73a518d2273}">
+        <p14:section name="Passo 1: installare PRG32-QT" id="{45b8a41d-ff5b-2928-c03d-f3e4c8c46244}">
           <p14:sldIdLst>
             <p14:sldId id="258"/>
             <p14:sldId id="259"/>
@@ -150,7 +150,7 @@
             <p14:sldId id="263"/>
           </p14:sldIdLst>
         </p14:section>
-        <p14:section name="Passo 2: installare la toolchain" id="{6f49b2c9-cb94-21fe-6a95-991e87b87c09}">
+        <p14:section name="Passo 2: installare la toolchain" id="{13abb1bb-aee7-90b3-14b4-87f3249297d5}">
           <p14:sldIdLst>
             <p14:sldId id="264"/>
             <p14:sldId id="265"/>
@@ -159,7 +159,7 @@
             <p14:sldId id="268"/>
           </p14:sldIdLst>
         </p14:section>
-        <p14:section name="Passo 3: la prima compilazione" id="{bd4eceee-2160-1c68-123c-dfbfd2a21c22}">
+        <p14:section name="Passo 3: la prima compilazione" id="{98f1cc80-e1c6-b82f-f86d-3ea048bdf2be}">
           <p14:sldIdLst>
             <p14:sldId id="269"/>
             <p14:sldId id="270"/>
@@ -167,20 +167,20 @@
             <p14:sldId id="272"/>
           </p14:sldIdLst>
         </p14:section>
-        <p14:section name="Facoltativo: QEMU e il kit" id="{321587c5-b054-0e6b-ff0d-090997625d37}">
+        <p14:section name="Facoltativo: QEMU e il kit" id="{83dd74a1-3479-7e86-9093-af60f8ca49f8}">
           <p14:sldIdLst>
             <p14:sldId id="273"/>
             <p14:sldId id="274"/>
           </p14:sldIdLst>
         </p14:section>
-        <p14:section name="Il programma completo" id="{c0dbe0e9-381a-74ae-8b08-f85dd0348b15}">
+        <p14:section name="Il programma completo" id="{eeec112d-88c5-d672-c00d-c1a7a66d38ab}">
           <p14:sldIdLst>
             <p14:sldId id="275"/>
             <p14:sldId id="276"/>
             <p14:sldId id="277"/>
           </p14:sldIdLst>
         </p14:section>
-        <p14:section name="Eseguire e provare" id="{76cbbb48-32db-621a-3b8b-c9f1aa944874}">
+        <p14:section name="Eseguire e provare" id="{8d359aed-d747-c5c2-9f62-66002bcd6377}">
           <p14:sldIdLst>
             <p14:sldId id="278"/>
             <p14:sldId id="279"/>
@@ -189,7 +189,7 @@
             <p14:sldId id="282"/>
           </p14:sldIdLst>
         </p14:section>
-        <p14:section name="Esercizi" id="{8af7ae68-d7a1-2f77-0b73-4d34d149ea03}">
+        <p14:section name="Esercizi" id="{be15b2bd-fdeb-3de7-24a5-5d14cefd0f20}">
           <p14:sldIdLst>
             <p14:sldId id="283"/>
           </p14:sldIdLst>
@@ -600,7 +600,7 @@
               <a:rPr lang="en-US" dirty="0"/>
               <a:t>Questa è la presentazione del codice della Lezione 01. Mentre la presentazione della lezione sviluppa i concetti, questa raccoglie tutto ciò che si scrive e si esegue: ogni listato con il suo commento, il programma completo della lezione, il risultato che deve produrre, e la procedura per provarlo su ciascuno dei tre host. Le due presentazioni vanno lette insieme: i concetti spiegano il codice, e il codice dà ai concetti una conseguenza osservabile.
 Stato di apprendimento: DA COMPRENDERE OGGI, alla fine di questa lezione lo spiegate, lo seguite passo passo e lo applicate da soli; DA UTILIZZARE OGGI, oggi seguite e usate la ricetta; come funziona dentro si spiega più avanti, o non fa parte del corso; DA COMPRENDERE PIÙ AVANTI, riconoscete il nome e lo scopo; lo spiega una lezione successiva. Una slide senza etichetta è contesto: una storia, un esempio, una domanda, un esercizio.
-Stato di apprendimento di questa lezione. DA COMPRENDERE OGGI: i componenti di PRG32. DA UTILIZZARE OGGI: gli strumenti di PRG32, il debugger di PRG32-QT, il programma completo (si usa, non si studia, in questo corso). DA COMPRENDERE PIÙ AVANTI: contratto init/update/draw (Lezione 02); i registri (Lezione 02). Una slide senza etichetta è contesto: una storia, un esempio, una domanda, un esercizio.</a:t>
+Stato di apprendimento di questa lezione. DA COMPRENDERE OGGI: programma, sorgente, codice macchina; i componenti di PRG32. DA UTILIZZARE OGGI: il terminale, gli strumenti di PRG32, il debugger di PRG32-QT, il programma completo (si usa, non si studia, in questo corso). DA COMPRENDERE PIÙ AVANTI: contratto init/update/draw (Lezione 02); i registri (Lezione 02). Una slide senza etichetta è contesto: una storia, un esempio, una domanda, un esercizio.</a:t>
             </a:r>
             <a:endParaRPr lang="en-US" dirty="0"/>
           </a:p>
@@ -688,7 +688,7 @@
           <a:p>
             <a:r>
               <a:rPr lang="en-US" dirty="0"/>
-              <a:t>Su macOS la procedura ha tre blocchi. Homebrew installa i prerequisiti. Si clona poi ESP-IDF, e install.sh scarica i compilatori per i due chip; è la parte lunga. La riga . ./export.sh comincia con un punto seguito da uno spazio, e il punto è significativo: fa sì che lo script modifichi la shell corrente, invece di un processo figlio le cui modifiche svanirebbero all'uscita. L'ultimo blocco clona PRG32 ed esegue il doctor. Gli stessi comandi funzionano su Apple Silicon e su Intel.
+              <a:t>Su macOS la procedura ha tre blocchi. Homebrew, un programma che installa altri programmi dal terminale, installa i prerequisiti. Si clona poi ESP-IDF, e install.sh scarica i compilatori per i due chip; è la parte lunga. La riga . ./export.sh comincia con un punto seguito da uno spazio, e il punto è significativo: fa sì che lo script, un file di comandi, modifichi la shell corrente, il programma che legge ciò che si scrive nel terminale, invece di una sua copia separata le cui modifiche svanirebbero alla fine. L'ultimo blocco clona PRG32 ed esegue il doctor. Gli stessi comandi funzionano su Apple Silicon e su Intel.
 DA UTILIZZARE OGGI: gli strumenti di PRG32 (si usa, non si studia, in questo corso).
 Per il docente: Dal README di PRG32. git può chiedere prima di installare gli strumenti da riga di comando di Xcode: accettate. Il clone ricorsivo e install.sh scaricano qualche gigabyte.</a:t>
             </a:r>
@@ -778,7 +778,7 @@
           <a:p>
             <a:r>
               <a:rPr lang="en-US" dirty="0"/>
-              <a:t>Su Debian e Ubuntu il primo blocco è un solo lungo comando apt, diviso su tre righe dalle barre rovesciate, e va copiato per intero. I passi 2 e 3 sono identici a quelli di macOS. Altre distribuzioni forniscono gli stessi pacchetti con nomi diversi. L'ultimo richiamo riguarda solo chi possiede un kit: per raggiungere la porta seriale della scheda l'utente deve appartenere al gruppo dialout, e la modifica ha effetto solo dopo essere usciti e rientrati nella sessione.
+              <a:t>Su Debian e Ubuntu il primo blocco è un solo lungo comando apt, diviso su tre righe dalle barre rovesciate, e va copiato per intero. I passi 2 e 3 sono identici a quelli di macOS. Altre distribuzioni forniscono gli stessi pacchetti con nomi diversi. L'ultimo richiamo riguarda solo chi possiede un kit: per raggiungere la porta seriale della scheda, il collegamento attraverso il cavo USB, l'utente deve appartenere al gruppo dialout, l'elenco degli utenti autorizzati a usarla, e la modifica ha effetto solo dopo essere usciti e rientrati nella sessione.
 DA UTILIZZARE OGGI: gli strumenti di PRG32 (si usa, non si studia, in questo corso).
 Per il docente: Dal README di PRG32. Il gruppo dialout dà accesso alla porta seriale della scheda: dopo il comando uscite dalla sessione e rientrate. Non serve per PRG32-QT né per QEMU.</a:t>
             </a:r>
@@ -868,7 +868,7 @@
           <a:p>
             <a:r>
               <a:rPr lang="en-US" dirty="0"/>
-              <a:t>Questa slide descrive la routine quotidiana e previene l'errore più comune delle prime settimane. In ogni nuovo terminale, prima di qualsiasi altra cosa, si attiva ESP-IDF con export.sh e ci si sposta nella cartella di PRG32. Due alias riducono la digitazione: get_idf esegue l'attivazione, e prg abbrevia python3 -m prg32. Su Windows, aprire ESP-IDF PowerShell ottiene lo stesso effetto. Conviene provocare l'errore una volta di proposito, eseguendo il doctor in un terminale nuovo senza attivazione: avendo visto qui il messaggio, lo si riconosce subito in seguito.
+              <a:t>Questa slide descrive la routine quotidiana e previene l'errore più comune delle prime settimane. In ogni nuovo terminale, prima di qualsiasi altra cosa, si attiva ESP-IDF con export.sh e ci si sposta nella cartella di PRG32. Due alias, nomi brevi che stanno per comandi più lunghi, riducono la digitazione: get_idf esegue l'attivazione, e prg abbrevia python3 -m prg32. Su Windows, aprire ESP-IDF PowerShell ottiene lo stesso effetto. Conviene provocare l'errore una volta di proposito, eseguendo il doctor in un terminale nuovo senza attivazione: avendo visto qui il messaggio, lo si riconosce subito in seguito.
 DA UTILIZZARE OGGI: gli strumenti di PRG32 (si usa, non si studia, in questo corso).
 Per il docente: L'errore più comune delle prime settimane. Far chiudere il terminale agli studenti, aprirne uno nuovo ed eseguire doctor senza attivare: devono vedere l'errore una volta, qui, e non durante un tutorial.</a:t>
             </a:r>
@@ -1048,7 +1048,7 @@
           <a:p>
             <a:r>
               <a:rPr lang="en-US" dirty="0"/>
-              <a:t>Il comando cartridge build prende un file sorgente e produce un file .prg32. Tre opzioni meritano di essere comprese. --entry-prefix pong_c è il nome che precede _init, _update e _draw nel sorgente, e identifica quindi i tre punti di ingresso. --portable produce una cartuccia che gira su ogni host e non su una sola immagine del firmware. --out dà il nome al file prodotto. Lo strumento riporta la dimensione del codice: un intero gioco di Pong occupa circa tremila byte. Il sorgente è un esempio in C del repository, scelto perché il compilatore si possa provare prima di aver scritto qualsiasi programma.
+              <a:t>Il comando cartridge build prende un file sorgente e produce un file .prg32. Tre opzioni, le parole che cominciano con -- e regolano ciò che fa un comando, meritano di essere comprese. --entry-prefix pong_c è il nome che precede _init, _update e _draw nel sorgente, e identifica quindi i tre punti di ingresso. --portable produce una cartuccia che gira su ogni host e non su una sola immagine del firmware. --out dà il nome al file prodotto. Lo strumento riporta la dimensione del codice: un intero gioco di Pong occupa circa tremila byte. Il sorgente è un esempio in C del repository, scelto perché il compilatore si possa provare prima di aver scritto qualsiasi programma.
 DA UTILIZZARE OGGI: gli strumenti di PRG32 (si usa, non si studia, in questo corso). DA COMPRENDERE PIÙ AVANTI: contratto init/update/draw (si studia nella Lezione 02).
 Per il docente: Pong in C dagli esempi del repository: dimostra che il compilatore funziona senza dover scrivere un programma. Nella Lezione 02 il sorgente è vostro, in assembly, e il comando è lo stesso. Su Windows scrivete python e mettete il comando su una riga sola.</a:t>
             </a:r>
@@ -1138,7 +1138,7 @@
           <a:p>
             <a:r>
               <a:rPr lang="en-US" dirty="0"/>
-              <a:t>PRG32-QT deve essere in esecuzione. Il primo comando, runtime, ne interroga lo stato; una risposta conferma che la connessione funziona. Il secondo, upload-and-run, memorizza la cartuccia nello slot cart0 e la avvia, e il gioco compare nella finestra di PRG32-QT. Il comando nomina l'esp32c6 perché, dal punto di vista dello strumento, PRG32-QT si comporta come una scheda in ascolto sulla porta 8080. Lo stesso comando, indirizzato a http://192.168.4.1, invia il gioco a una scheda fisica. Senza gli strumenti, il file si può anche importare dal menu di PRG32-QT.
+              <a:t>PRG32-QT deve essere in esecuzione. Il primo comando, runtime, ne interroga lo stato; una risposta conferma che la connessione funziona. Il secondo, upload-and-run, memorizza la cartuccia nello slot cart0 e la avvia, e il gioco compare nella finestra di PRG32-QT. Il comando nomina l'esp32c6 perché, dal punto di vista dello strumento, PRG32-QT si comporta come una scheda in ascolto sulla porta 8080. Lo stesso comando, indirizzato a http://192.168.4.1, l'indirizzo di rete della scheda sulla sua rete Wi-Fi, invia il gioco a una scheda fisica. Senza gli strumenti, il file si può anche importare dal menu di PRG32-QT.
 DA UTILIZZARE OGGI: gli strumenti di PRG32 (si usa, non si studia, in questo corso).
 Per il docente: Eseguito per queste slide su macOS. Se localhost non risponde, leggete l'indirizzo sulla schermata Setup di PRG32-QT e usate quello. Senza gli strumenti: in PRG32-QT importate il file pong.prg32 e scegliete Run Cartridge. Lo stesso comando con --url http://192.168.4.1 invia il gioco a una scheda vera.</a:t>
             </a:r>
@@ -2485,7 +2485,7 @@
           <a:p>
             <a:r>
               <a:rPr lang="en-US" dirty="0"/>
-              <a:t>Lo studente individua la riga del proprio sistema operativo e scarica quel file dalla pagina Releases del repository di PRG32-QT, scegliendo sempre l'ultima versione. Per Windows c'è un installatore, per macOS un'immagine disco (una per Apple Silicon e una per i processori Intel), per Linux e Raspberry Pi OS un pacchetto Debian. Il numero di versione 0.4.1 è quello di ottobre 2026; nel frattempo può essere cresciuto, ma i nomi dei file seguono lo stesso schema. La slide su macOS spiega come capire quale processore contiene un Mac.
+              <a:t>Lo studente individua la riga del proprio sistema operativo e scarica quel file dalla pagina Releases del repository di PRG32-QT, scegliendo sempre l'ultima versione. Per Windows c'è un installatore, per macOS un'immagine disco (una per Apple Silicon e una per i processori Intel), per Linux e Raspberry Pi OS un pacchetto Debian. Sono tre modi di consegnare un'applicazione: un file che, una volta aperto, copia il programma nel posto giusto del computer. Il numero di versione 0.4.1 è quello di ottobre 2026; nel frattempo può essere cresciuto, ma i nomi dei file seguono lo stesso schema. La slide su macOS spiega come capire quale processore contiene un Mac.
 DA UTILIZZARE OGGI: gli strumenti di PRG32 (si usa, non si studia, in questo corso).
 Per il docente: Da github.com/riscv-prg32/PRG32-QT, Releases, l'ultimo rilascio. 0.4.1 è la versione di ottobre 2026: i nomi dei file seguono questo schema con il numero corrente. Il file SHA256SUMS-platforms.txt elenca le somme di controllo. Nella stessa pagina ci sono i pacchetti per Android e Android TV.</a:t>
             </a:r>
@@ -2575,7 +2575,7 @@
           <a:p>
             <a:r>
               <a:rPr lang="en-US" dirty="0"/>
-              <a:t>Su Windows l'installazione consiste in quattro azioni: scaricare il file Setup, eseguirlo, accettare la cartella proposta e avviare PRG32 dal menu Start. Possono comparire due avvisi, entrambi attesi. SmartScreen può mostrare un riquadro blu perché l'installatore non proviene dal Microsoft Store; il rimedio è Ulteriori informazioni, poi Esegui comunque. Il firewall può chiedere un permesso, da concedere per le reti private: PRG32-QT ascolta sulla porta 8080 per ricevere le cartucce dagli strumenti, una funzione usata nel passo 3.
+              <a:t>Su Windows l'installazione consiste in quattro azioni: scaricare il file Setup, eseguirlo, accettare la cartella proposta e avviare PRG32 dal menu Start. Possono comparire due avvisi, entrambi attesi. SmartScreen può mostrare un riquadro blu perché l'installatore non proviene dal Microsoft Store; il rimedio è Ulteriori informazioni, poi Esegui comunque. Il firewall, la parte del sistema che decide quali programmi possono ricevere connessioni dalla rete, può chiedere un permesso, da concedere per le reti private: PRG32-QT ascolta sulla porta 8080 per ricevere le cartucce dagli strumenti, una funzione usata nel passo 3.
 DA UTILIZZARE OGGI: gli strumenti di PRG32 (si usa, non si studia, in questo corso).
 Per il docente: L'installatore contiene le librerie Qt e il runtime del compilatore: non c'è altro da installare. La domanda del firewall compare perché PRG32-QT ascolta sulla porta 8080 le cartucce inviate dagli strumenti: il passo 3 la usa.</a:t>
             </a:r>
@@ -2755,7 +2755,7 @@
           <a:p>
             <a:r>
               <a:rPr lang="en-US" dirty="0"/>
-              <a:t>Su Linux la metà superiore del listato installa il pacchetto: apt install con ./ davanti al nome del file installa quel file insieme alle sue dipendenze, e il programma diventa disponibile come /usr/bin/PRG32. Il requisito da verificare è Qt 6.5 o successivo, che Debian 13 e Ubuntu 25.04 soddisfano e Ubuntu 24.04 no. La metà inferiore è l'alternativa per i sistemi più vecchi: compilare dai sorgenti con lo script fornito nel repository. Le righe che cominciano con # sono commenti e non vanno digitate.
+              <a:t>Su Linux la metà superiore del listato installa il pacchetto: apt install con ./ davanti al nome del file installa quel file insieme alle sue dipendenze, gli altri programmi di cui ha bisogno per funzionare, e il programma diventa disponibile come /usr/bin/PRG32. Il requisito da verificare è Qt 6.5 o successivo (Qt è la libreria di finestre, pulsanti e grafica già pronti su cui è costruito PRG32-QT), che Debian 13 e Ubuntu 25.04 soddisfano e Ubuntu 24.04 no. La metà inferiore è l'alternativa per i sistemi più vecchi: compilare dai sorgenti con lo script fornito nel repository. Le righe che cominciano con # sono commenti e non vanno digitate.
 DA UTILIZZARE OGGI: gli strumenti di PRG32 (si usa, non si studia, in questo corso).
 Per il docente: Il pacchetto dipende dai pacchetti Qt 6 QML, Multimedia e WebSockets della distribuzione. Dove il Qt di sistema è più vecchio della 6.5, installate Qt con l'installatore online di qt.io e compilate con quello. Su Raspberry Pi OS usate il pacchetto ARM64, oppure scripts/build-raspbian.sh.</a:t>
             </a:r>
@@ -3023,7 +3023,7 @@
           <a:p>
             <a:r>
               <a:rPr lang="en-US" dirty="0"/>
-              <a:t>Su Windows i primi tre passi usano installatori grafici: Git, Python e l'ESP-IDF Tools Installer, in cui si scelgono una versione 5.4 o successiva e i target esp32c3 ed esp32c6. L'installatore crea un collegamento chiamato ESP-IDF PowerShell; tutto il lavoro va fatto in quella finestra e mai in un terminale qualsiasi, perché solo lì l'ambiente è attivo. I cinque comandi che seguono clonano il repository di PRG32, installano due pacchetti Python ed eseguono il doctor. Su Windows l'interprete si invoca come python, non python3.
+              <a:t>Su Windows i primi tre passi usano installatori grafici: Git, il programma che copia e tiene traccia dei repository; Python, un linguaggio di programmazione in cui sono scritti gli strumenti di PRG32; e l'ESP-IDF Tools Installer, in cui si scelgono una versione 5.4 o successiva e i target esp32c3 ed esp32c6. L'installatore crea un collegamento chiamato ESP-IDF PowerShell; tutto il lavoro va fatto in quella finestra e mai in un terminale qualsiasi, perché solo lì l'ambiente è attivo: le impostazioni che dicono al terminale dove si trovano il compilatore e i suoi strumenti. I cinque comandi che seguono clonano il repository di PRG32, cioè lo copiano sul portatile, installano due pacchetti Python (librerie di cui gli strumenti hanno bisogno) ed eseguono il doctor, un comando che controlla l'installazione. Su Windows l'interprete si invoca come python, non python3.
 DA UTILIZZARE OGGI: gli strumenti di PRG32 (si usa, non si studia, in questo corso).
 Per il docente: Dal README di PRG32. Un'alternativa per chi preferisce un editor: Visual Studio Code con l'estensione Espressif ESP-IDF, che installa la stessa toolchain. Evitate cartelle con spazi o lettere accentate nel percorso: i vecchi strumenti di compilazione non li gradiscono.</a:t>
             </a:r>

--- a/it/slides/01-Architettura_dei_Calcolatori-PRG32_e_PRG32-QT_Installazione-Lab.pptx
+++ b/it/slides/01-Architettura_dei_Calcolatori-PRG32_e_PRG32-QT_Installazione-Lab.pptx
@@ -134,13 +134,13 @@
   <p:extLst>
     <p:ext uri="{521415D9-36F7-43E2-AB2F-B90AF26B5E84}">
       <p14:sectionLst xmlns:p14="http://schemas.microsoft.com/office/powerpoint/2010/main">
-        <p14:section name="Apertura" id="{4f3a6705-d646-9949-8a3a-830cce817339}">
+        <p14:section name="Apertura" id="{3104845f-9d3f-5bbb-d0f9-b86eeb17a95c}">
           <p14:sldIdLst>
             <p14:sldId id="256"/>
             <p14:sldId id="257"/>
           </p14:sldIdLst>
         </p14:section>
-        <p14:section name="Passo 1: installare PRG32-QT" id="{45b8a41d-ff5b-2928-c03d-f3e4c8c46244}">
+        <p14:section name="Passo 1: installare PRG32-QT" id="{8cfa4e8b-d3ab-8b85-f18a-8ab512369221}">
           <p14:sldIdLst>
             <p14:sldId id="258"/>
             <p14:sldId id="259"/>
@@ -150,7 +150,7 @@
             <p14:sldId id="263"/>
           </p14:sldIdLst>
         </p14:section>
-        <p14:section name="Passo 2: installare la toolchain" id="{13abb1bb-aee7-90b3-14b4-87f3249297d5}">
+        <p14:section name="Passo 2: installare la toolchain" id="{f436e271-4cf0-ac03-a505-7035c429c801}">
           <p14:sldIdLst>
             <p14:sldId id="264"/>
             <p14:sldId id="265"/>
@@ -159,7 +159,7 @@
             <p14:sldId id="268"/>
           </p14:sldIdLst>
         </p14:section>
-        <p14:section name="Passo 3: la prima compilazione" id="{98f1cc80-e1c6-b82f-f86d-3ea048bdf2be}">
+        <p14:section name="Passo 3: la prima compilazione" id="{f3ce8337-07b3-59cb-64d1-10c9eda4867a}">
           <p14:sldIdLst>
             <p14:sldId id="269"/>
             <p14:sldId id="270"/>
@@ -167,20 +167,20 @@
             <p14:sldId id="272"/>
           </p14:sldIdLst>
         </p14:section>
-        <p14:section name="Facoltativo: QEMU e il kit" id="{83dd74a1-3479-7e86-9093-af60f8ca49f8}">
+        <p14:section name="Facoltativo: QEMU e il kit" id="{9b49d7e5-221e-f2d6-6a49-0c7748756876}">
           <p14:sldIdLst>
             <p14:sldId id="273"/>
             <p14:sldId id="274"/>
           </p14:sldIdLst>
         </p14:section>
-        <p14:section name="Il programma completo" id="{eeec112d-88c5-d672-c00d-c1a7a66d38ab}">
+        <p14:section name="Il programma completo" id="{ce865165-029d-d35f-03f1-256feb518215}">
           <p14:sldIdLst>
             <p14:sldId id="275"/>
             <p14:sldId id="276"/>
             <p14:sldId id="277"/>
           </p14:sldIdLst>
         </p14:section>
-        <p14:section name="Eseguire e provare" id="{8d359aed-d747-c5c2-9f62-66002bcd6377}">
+        <p14:section name="Eseguire e provare" id="{62659935-60bc-536a-9836-7e51dba05860}">
           <p14:sldIdLst>
             <p14:sldId id="278"/>
             <p14:sldId id="279"/>
@@ -189,7 +189,7 @@
             <p14:sldId id="282"/>
           </p14:sldIdLst>
         </p14:section>
-        <p14:section name="Esercizi" id="{be15b2bd-fdeb-3de7-24a5-5d14cefd0f20}">
+        <p14:section name="Esercizi" id="{8d76e66e-3fe3-9da9-40f4-834af3b4b223}">
           <p14:sldIdLst>
             <p14:sldId id="283"/>
           </p14:sldIdLst>
@@ -600,7 +600,8 @@
               <a:rPr lang="en-US" dirty="0"/>
               <a:t>Questa è la presentazione del codice della Lezione 01. Mentre la presentazione della lezione sviluppa i concetti, questa raccoglie tutto ciò che si scrive e si esegue: ogni listato con il suo commento, il programma completo della lezione, il risultato che deve produrre, e la procedura per provarlo su ciascuno dei tre host. Le due presentazioni vanno lette insieme: i concetti spiegano il codice, e il codice dà ai concetti una conseguenza osservabile.
 Stato di apprendimento: DA COMPRENDERE OGGI, alla fine di questa lezione lo spiegate, lo seguite passo passo e lo applicate da soli; DA UTILIZZARE OGGI, oggi seguite e usate la ricetta; come funziona dentro si spiega più avanti, o non fa parte del corso; DA COMPRENDERE PIÙ AVANTI, riconoscete il nome e lo scopo; lo spiega una lezione successiva. Una slide senza etichetta è contesto: una storia, un esempio, una domanda, un esercizio.
-Stato di apprendimento di questa lezione. DA COMPRENDERE OGGI: programma, sorgente, codice macchina; i componenti di PRG32. DA UTILIZZARE OGGI: il terminale, gli strumenti di PRG32, il debugger di PRG32-QT, il programma completo (si usa, non si studia, in questo corso). DA COMPRENDERE PIÙ AVANTI: contratto init/update/draw (Lezione 02); i registri (Lezione 02). Una slide senza etichetta è contesto: una storia, un esempio, una domanda, un esercizio.</a:t>
+Stato di apprendimento di questa lezione. DA COMPRENDERE OGGI: programma, sorgente, codice macchina; i componenti di PRG32. DA UTILIZZARE OGGI: il terminale, gli strumenti di PRG32, il debugger di PRG32-QT, il programma completo (si usa, non si studia, in questo corso). DA COMPRENDERE PIÙ AVANTI: contratto init/update/draw (Lezione 02); i registri (Lezione 02). Una slide senza etichetta è contesto: una storia, un esempio, una domanda, un esercizio.
+Percorso. I risultati di oggi: (1) spiegare il percorso da un file sorgente a una cartuccia in esecuzione: sorgente, traduttore, codice macchina, cartuccia, host; (2) eseguire una cartuccia in PRG32-QT e compilarne una dal terminale. Si appoggia su: la Lezione 00, e Partire da zero per chi non ha mai programmato. Prossimo passo: Lezione 02, Primo contatto: l'assembly RISC-V su PRG32.</a:t>
             </a:r>
             <a:endParaRPr lang="en-US" dirty="0"/>
           </a:p>
